--- a/data-eng/decks/w6d1s3.pptx
+++ b/data-eng/decks/w6d1s3.pptx
@@ -3099,7 +3099,7 @@
       <p:grpSpPr/>
       <p:sp>
         <p:nvSpPr>
-          <p:cNvPr id="2" name="Oval 1"/>
+          <p:cNvPr id="2" name="deckgen:decor"/>
           <p:cNvSpPr/>
           <p:nvPr/>
         </p:nvSpPr>
@@ -3129,7 +3129,7 @@
       </p:sp>
       <p:sp>
         <p:nvSpPr>
-          <p:cNvPr id="3" name="Oval 2"/>
+          <p:cNvPr id="3" name="deckgen:decor"/>
           <p:cNvSpPr/>
           <p:nvPr/>
         </p:nvSpPr>
@@ -3159,7 +3159,7 @@
       </p:sp>
       <p:sp>
         <p:nvSpPr>
-          <p:cNvPr id="4" name="Oval 3"/>
+          <p:cNvPr id="4" name="deckgen:decor"/>
           <p:cNvSpPr/>
           <p:nvPr/>
         </p:nvSpPr>
@@ -3189,7 +3189,7 @@
       </p:sp>
       <p:sp>
         <p:nvSpPr>
-          <p:cNvPr id="5" name="Rectangle 4"/>
+          <p:cNvPr id="5" name="deckgen:decor"/>
           <p:cNvSpPr/>
           <p:nvPr/>
         </p:nvSpPr>
@@ -3219,7 +3219,7 @@
       </p:sp>
       <p:sp>
         <p:nvSpPr>
-          <p:cNvPr id="6" name="Oval 5"/>
+          <p:cNvPr id="6" name="deckgen:decor"/>
           <p:cNvSpPr/>
           <p:nvPr/>
         </p:nvSpPr>
@@ -3249,7 +3249,7 @@
       </p:sp>
       <p:sp>
         <p:nvSpPr>
-          <p:cNvPr id="7" name="Oval 6"/>
+          <p:cNvPr id="7" name="deckgen:decor"/>
           <p:cNvSpPr/>
           <p:nvPr/>
         </p:nvSpPr>
@@ -3279,7 +3279,7 @@
       </p:sp>
       <p:sp>
         <p:nvSpPr>
-          <p:cNvPr id="8" name="Oval 7"/>
+          <p:cNvPr id="8" name="deckgen:decor"/>
           <p:cNvSpPr/>
           <p:nvPr/>
         </p:nvSpPr>
@@ -3309,7 +3309,7 @@
       </p:sp>
       <p:sp>
         <p:nvSpPr>
-          <p:cNvPr id="9" name="Oval 8"/>
+          <p:cNvPr id="9" name="deckgen:decor"/>
           <p:cNvSpPr/>
           <p:nvPr/>
         </p:nvSpPr>
@@ -3339,7 +3339,7 @@
       </p:sp>
       <p:sp>
         <p:nvSpPr>
-          <p:cNvPr id="10" name="Rectangle 9"/>
+          <p:cNvPr id="10" name="deckgen:decor"/>
           <p:cNvSpPr/>
           <p:nvPr/>
         </p:nvSpPr>
@@ -3599,7 +3599,7 @@
       <p:grpSpPr/>
       <p:sp>
         <p:nvSpPr>
-          <p:cNvPr id="2" name="Oval 1"/>
+          <p:cNvPr id="2" name="deckgen:decor"/>
           <p:cNvSpPr/>
           <p:nvPr/>
         </p:nvSpPr>
@@ -3629,7 +3629,7 @@
       </p:sp>
       <p:sp>
         <p:nvSpPr>
-          <p:cNvPr id="3" name="Oval 2"/>
+          <p:cNvPr id="3" name="deckgen:decor"/>
           <p:cNvSpPr/>
           <p:nvPr/>
         </p:nvSpPr>
@@ -4406,7 +4406,7 @@
       <p:grpSpPr/>
       <p:sp>
         <p:nvSpPr>
-          <p:cNvPr id="2" name="Oval 1"/>
+          <p:cNvPr id="2" name="deckgen:decor"/>
           <p:cNvSpPr/>
           <p:nvPr/>
         </p:nvSpPr>
@@ -4436,7 +4436,7 @@
       </p:sp>
       <p:sp>
         <p:nvSpPr>
-          <p:cNvPr id="3" name="Oval 2"/>
+          <p:cNvPr id="3" name="deckgen:decor"/>
           <p:cNvSpPr/>
           <p:nvPr/>
         </p:nvSpPr>
@@ -4466,7 +4466,7 @@
       </p:sp>
       <p:sp>
         <p:nvSpPr>
-          <p:cNvPr id="4" name="Oval 3"/>
+          <p:cNvPr id="4" name="deckgen:decor"/>
           <p:cNvSpPr/>
           <p:nvPr/>
         </p:nvSpPr>
@@ -5260,7 +5260,7 @@
                 <a:ea typeface="Pretendard"/>
                 <a:cs typeface="Pretendard"/>
               </a:rPr>
-              <a:t>GetOffsetShell 이 찍어 준 파티션별 오프셋 값을 옆 사람과 비교해 보세요 — 키를 어떻게 줬느냐로 달라집니다</a:t>
+              <a:t>kafka-get-offsets.sh 가 찍어 준 파티션별 오프셋 값을 옆 사람과 비교해 보세요 — 키를 어떻게 줬느냐로 달라집니다</a:t>
             </a:r>
           </a:p>
         </p:txBody>
@@ -5397,7 +5397,7 @@
       <p:grpSpPr/>
       <p:sp>
         <p:nvSpPr>
-          <p:cNvPr id="2" name="Oval 1"/>
+          <p:cNvPr id="2" name="deckgen:decor"/>
           <p:cNvSpPr/>
           <p:nvPr/>
         </p:nvSpPr>
@@ -5427,7 +5427,7 @@
       </p:sp>
       <p:sp>
         <p:nvSpPr>
-          <p:cNvPr id="3" name="Oval 2"/>
+          <p:cNvPr id="3" name="deckgen:decor"/>
           <p:cNvSpPr/>
           <p:nvPr/>
         </p:nvSpPr>
@@ -5457,7 +5457,7 @@
       </p:sp>
       <p:sp>
         <p:nvSpPr>
-          <p:cNvPr id="4" name="Oval 3"/>
+          <p:cNvPr id="4" name="deckgen:decor"/>
           <p:cNvSpPr/>
           <p:nvPr/>
         </p:nvSpPr>
@@ -7783,7 +7783,7 @@
       <p:grpSpPr/>
       <p:sp>
         <p:nvSpPr>
-          <p:cNvPr id="2" name="Oval 1"/>
+          <p:cNvPr id="2" name="deckgen:decor"/>
           <p:cNvSpPr/>
           <p:nvPr/>
         </p:nvSpPr>
@@ -7813,7 +7813,7 @@
       </p:sp>
       <p:sp>
         <p:nvSpPr>
-          <p:cNvPr id="3" name="Oval 2"/>
+          <p:cNvPr id="3" name="deckgen:decor"/>
           <p:cNvSpPr/>
           <p:nvPr/>
         </p:nvSpPr>
@@ -7843,7 +7843,7 @@
       </p:sp>
       <p:sp>
         <p:nvSpPr>
-          <p:cNvPr id="4" name="Oval 3"/>
+          <p:cNvPr id="4" name="deckgen:decor"/>
           <p:cNvSpPr/>
           <p:nvPr/>
         </p:nvSpPr>
@@ -9170,7 +9170,7 @@
                 <a:ea typeface="Pretendard"/>
                 <a:cs typeface="Pretendard"/>
               </a:rPr>
-              <a:t>kafka-run-class.sh kafka.tools.GetOffsetShell --topic T</a:t>
+              <a:t>kafka-get-offsets.sh --topic T</a:t>
             </a:r>
           </a:p>
         </p:txBody>
@@ -9348,7 +9348,7 @@
       <p:grpSpPr/>
       <p:sp>
         <p:nvSpPr>
-          <p:cNvPr id="2" name="Oval 1"/>
+          <p:cNvPr id="2" name="deckgen:decor"/>
           <p:cNvSpPr/>
           <p:nvPr/>
         </p:nvSpPr>
@@ -9378,7 +9378,7 @@
       </p:sp>
       <p:sp>
         <p:nvSpPr>
-          <p:cNvPr id="3" name="Oval 2"/>
+          <p:cNvPr id="3" name="deckgen:decor"/>
           <p:cNvSpPr/>
           <p:nvPr/>
         </p:nvSpPr>
@@ -9408,7 +9408,7 @@
       </p:sp>
       <p:sp>
         <p:nvSpPr>
-          <p:cNvPr id="4" name="Oval 3"/>
+          <p:cNvPr id="4" name="deckgen:decor"/>
           <p:cNvSpPr/>
           <p:nvPr/>
         </p:nvSpPr>
@@ -10711,7 +10711,7 @@
                 <a:ea typeface="Pretendard"/>
                 <a:cs typeface="Pretendard"/>
               </a:rPr>
-              <a:t>같은 키 → 같은 파티션, GetOffsetShell 로 오프셋이 느는 것을 봤다</a:t>
+              <a:t>같은 키 → 같은 파티션, kafka-get-offsets.sh 로 오프셋이 느는 것을 봤다</a:t>
             </a:r>
           </a:p>
         </p:txBody>
@@ -10848,7 +10848,7 @@
       <p:grpSpPr/>
       <p:sp>
         <p:nvSpPr>
-          <p:cNvPr id="2" name="Oval 1"/>
+          <p:cNvPr id="2" name="deckgen:decor"/>
           <p:cNvSpPr/>
           <p:nvPr/>
         </p:nvSpPr>
@@ -10878,7 +10878,7 @@
       </p:sp>
       <p:sp>
         <p:nvSpPr>
-          <p:cNvPr id="3" name="Oval 2"/>
+          <p:cNvPr id="3" name="deckgen:decor"/>
           <p:cNvSpPr/>
           <p:nvPr/>
         </p:nvSpPr>
@@ -10908,7 +10908,7 @@
       </p:sp>
       <p:sp>
         <p:nvSpPr>
-          <p:cNvPr id="4" name="Oval 3"/>
+          <p:cNvPr id="4" name="deckgen:decor"/>
           <p:cNvSpPr/>
           <p:nvPr/>
         </p:nvSpPr>
@@ -12550,7 +12550,7 @@
       <p:grpSpPr/>
       <p:sp>
         <p:nvSpPr>
-          <p:cNvPr id="2" name="Oval 1"/>
+          <p:cNvPr id="2" name="deckgen:decor"/>
           <p:cNvSpPr/>
           <p:nvPr/>
         </p:nvSpPr>
@@ -12580,7 +12580,7 @@
       </p:sp>
       <p:sp>
         <p:nvSpPr>
-          <p:cNvPr id="3" name="Oval 2"/>
+          <p:cNvPr id="3" name="deckgen:decor"/>
           <p:cNvSpPr/>
           <p:nvPr/>
         </p:nvSpPr>
@@ -12610,7 +12610,7 @@
       </p:sp>
       <p:sp>
         <p:nvSpPr>
-          <p:cNvPr id="4" name="Oval 3"/>
+          <p:cNvPr id="4" name="deckgen:decor"/>
           <p:cNvSpPr/>
           <p:nvPr/>
         </p:nvSpPr>
@@ -13670,7 +13670,7 @@
       <p:grpSpPr/>
       <p:sp>
         <p:nvSpPr>
-          <p:cNvPr id="2" name="Oval 1"/>
+          <p:cNvPr id="2" name="deckgen:decor"/>
           <p:cNvSpPr/>
           <p:nvPr/>
         </p:nvSpPr>
@@ -13700,7 +13700,7 @@
       </p:sp>
       <p:sp>
         <p:nvSpPr>
-          <p:cNvPr id="3" name="Oval 2"/>
+          <p:cNvPr id="3" name="deckgen:decor"/>
           <p:cNvSpPr/>
           <p:nvPr/>
         </p:nvSpPr>
@@ -13730,7 +13730,7 @@
       </p:sp>
       <p:sp>
         <p:nvSpPr>
-          <p:cNvPr id="4" name="Oval 3"/>
+          <p:cNvPr id="4" name="deckgen:decor"/>
           <p:cNvSpPr/>
           <p:nvPr/>
         </p:nvSpPr>
@@ -14697,7 +14697,7 @@
       <p:grpSpPr/>
       <p:sp>
         <p:nvSpPr>
-          <p:cNvPr id="2" name="Oval 1"/>
+          <p:cNvPr id="2" name="deckgen:decor"/>
           <p:cNvSpPr/>
           <p:nvPr/>
         </p:nvSpPr>
@@ -14727,7 +14727,7 @@
       </p:sp>
       <p:sp>
         <p:nvSpPr>
-          <p:cNvPr id="3" name="Oval 2"/>
+          <p:cNvPr id="3" name="deckgen:decor"/>
           <p:cNvSpPr/>
           <p:nvPr/>
         </p:nvSpPr>
@@ -14757,7 +14757,7 @@
       </p:sp>
       <p:sp>
         <p:nvSpPr>
-          <p:cNvPr id="4" name="Oval 3"/>
+          <p:cNvPr id="4" name="deckgen:decor"/>
           <p:cNvSpPr/>
           <p:nvPr/>
         </p:nvSpPr>
@@ -14963,7 +14963,7 @@
       </p:sp>
       <p:sp>
         <p:nvSpPr>
-          <p:cNvPr id="10" name="TextBox 9"/>
+          <p:cNvPr id="10" name="deckgen:ornament"/>
           <p:cNvSpPr txBox="1"/>
           <p:nvPr/>
         </p:nvSpPr>
@@ -15148,7 +15148,7 @@
       </p:sp>
       <p:sp>
         <p:nvSpPr>
-          <p:cNvPr id="14" name="TextBox 13"/>
+          <p:cNvPr id="14" name="deckgen:ornament"/>
           <p:cNvSpPr txBox="1"/>
           <p:nvPr/>
         </p:nvSpPr>
@@ -15333,7 +15333,7 @@
       </p:sp>
       <p:sp>
         <p:nvSpPr>
-          <p:cNvPr id="18" name="TextBox 17"/>
+          <p:cNvPr id="18" name="deckgen:ornament"/>
           <p:cNvSpPr txBox="1"/>
           <p:nvPr/>
         </p:nvSpPr>

--- a/data-eng/decks/w6d1s3.pptx
+++ b/data-eng/decks/w6d1s3.pptx
@@ -3852,7 +3852,7 @@
         </p:nvSpPr>
         <p:spPr>
           <a:xfrm>
-            <a:off x="1428750" y="5486400"/>
+            <a:off x="1428750" y="5476875"/>
             <a:ext cx="419100" cy="381000"/>
           </a:xfrm>
           <a:prstGeom prst="rect">
@@ -3893,7 +3893,7 @@
         </p:nvSpPr>
         <p:spPr>
           <a:xfrm>
-            <a:off x="1905000" y="5486400"/>
+            <a:off x="1905000" y="5476875"/>
             <a:ext cx="6724650" cy="381000"/>
           </a:xfrm>
           <a:prstGeom prst="rect">
@@ -3968,7 +3968,7 @@
         </p:nvSpPr>
         <p:spPr>
           <a:xfrm>
-            <a:off x="9658350" y="5486400"/>
+            <a:off x="9658350" y="5476875"/>
             <a:ext cx="419100" cy="381000"/>
           </a:xfrm>
           <a:prstGeom prst="rect">
@@ -4009,7 +4009,7 @@
         </p:nvSpPr>
         <p:spPr>
           <a:xfrm>
-            <a:off x="10134600" y="5486400"/>
+            <a:off x="10134600" y="5476875"/>
             <a:ext cx="6724650" cy="381000"/>
           </a:xfrm>
           <a:prstGeom prst="rect">
@@ -4084,7 +4084,7 @@
         </p:nvSpPr>
         <p:spPr>
           <a:xfrm>
-            <a:off x="1428750" y="6515100"/>
+            <a:off x="1428750" y="6505575"/>
             <a:ext cx="419100" cy="381000"/>
           </a:xfrm>
           <a:prstGeom prst="rect">
@@ -4125,7 +4125,7 @@
         </p:nvSpPr>
         <p:spPr>
           <a:xfrm>
-            <a:off x="1905000" y="6515100"/>
+            <a:off x="1905000" y="6505575"/>
             <a:ext cx="6724650" cy="381000"/>
           </a:xfrm>
           <a:prstGeom prst="rect">
@@ -4200,7 +4200,7 @@
         </p:nvSpPr>
         <p:spPr>
           <a:xfrm>
-            <a:off x="9658350" y="6515100"/>
+            <a:off x="9658350" y="6505575"/>
             <a:ext cx="419100" cy="381000"/>
           </a:xfrm>
           <a:prstGeom prst="rect">
@@ -4241,7 +4241,7 @@
         </p:nvSpPr>
         <p:spPr>
           <a:xfrm>
-            <a:off x="10134600" y="6515100"/>
+            <a:off x="10134600" y="6505575"/>
             <a:ext cx="6724650" cy="381000"/>
           </a:xfrm>
           <a:prstGeom prst="rect">
@@ -4381,7 +4381,7 @@
                 <a:ea typeface="Pretendard"/>
                 <a:cs typeface="Pretendard"/>
               </a:rPr>
-              <a:t>docker rm -f kafka · week6/ 폴더</a:t>
+              <a:t>docker rm -fv kafka · week6/ 폴더</a:t>
             </a:r>
           </a:p>
         </p:txBody>
@@ -5039,7 +5039,7 @@
                 <a:ea typeface="Pretendard"/>
                 <a:cs typeface="Pretendard"/>
               </a:rPr>
-              <a:t>자주 겪는 오류 네 가지의 원인과 해결을 안다</a:t>
+              <a:t>자주 겪는 오류 다섯 가지의 원인과 해결을 안다</a:t>
             </a:r>
           </a:p>
         </p:txBody>
@@ -5185,7 +5185,7 @@
                 <a:ea typeface="Pretendard"/>
                 <a:cs typeface="Pretendard"/>
               </a:rPr>
-              <a:t>docker rm -f kafka 뒤 이미지·메모리로 6-2 준비를 확인한다</a:t>
+              <a:t>docker rm -fv kafka 뒤 이미지 · 메모리로 6-2 준비를 확인한다</a:t>
             </a:r>
           </a:p>
         </p:txBody>
@@ -5260,7 +5260,7 @@
                 <a:ea typeface="Pretendard"/>
                 <a:cs typeface="Pretendard"/>
               </a:rPr>
-              <a:t>kafka-get-offsets.sh 가 찍어 준 파티션별 오프셋 값을 옆 사람과 비교해 보세요 — 키를 어떻게 줬느냐로 달라집니다</a:t>
+              <a:t>get-offsets 결과를 채팅에 올려 비교해 보세요 — 키 없는 메시지가 모인 칸은 사람마다 다릅니다</a:t>
             </a:r>
           </a:p>
         </p:txBody>
@@ -11331,7 +11331,7 @@
                 <a:ea typeface="Pretendard"/>
                 <a:cs typeface="Pretendard"/>
               </a:rPr>
-              <a:t>docker run 직후</a:t>
+              <a:t>docker run 이 Conflict ·</a:t>
             </a:r>
           </a:p>
           <a:p>
@@ -11349,7 +11349,7 @@
                 <a:ea typeface="Pretendard"/>
                 <a:cs typeface="Pretendard"/>
               </a:rPr>
-              <a:t>Exited</a:t>
+              <a:t>port is already allocated</a:t>
             </a:r>
           </a:p>
         </p:txBody>
@@ -11424,7 +11424,7 @@
                 <a:ea typeface="Pretendard"/>
                 <a:cs typeface="Pretendard"/>
               </a:rPr>
-              <a:t>같은 이름 컨테이너 또는</a:t>
+              <a:t>같은 이름 컨테이너 ·</a:t>
             </a:r>
           </a:p>
           <a:p>
@@ -11442,7 +11442,7 @@
                 <a:ea typeface="Pretendard"/>
                 <a:cs typeface="Pretendard"/>
               </a:rPr>
-              <a:t>9092 포트 점유</a:t>
+              <a:t>9092 를 다른 것이 씀</a:t>
             </a:r>
           </a:p>
         </p:txBody>
@@ -11517,7 +11517,7 @@
                 <a:ea typeface="Pretendard"/>
                 <a:cs typeface="Pretendard"/>
               </a:rPr>
-              <a:t>docker rm -f kafka ·</a:t>
+              <a:t>docker rm -fv kafka ·</a:t>
             </a:r>
           </a:p>
           <a:p>
@@ -11535,7 +11535,7 @@
                 <a:ea typeface="Pretendard"/>
                 <a:cs typeface="Pretendard"/>
               </a:rPr>
-              <a:t>lsof -i :9092 확인</a:t>
+              <a:t>실습점검 2단계로 찾기</a:t>
             </a:r>
           </a:p>
         </p:txBody>
@@ -11610,7 +11610,7 @@
                 <a:ea typeface="Pretendard"/>
                 <a:cs typeface="Pretendard"/>
               </a:rPr>
-              <a:t>kafka-topics.sh 에</a:t>
+              <a:t>WARN Connection to node -1</a:t>
             </a:r>
           </a:p>
           <a:p>
@@ -11628,7 +11628,7 @@
                 <a:ea typeface="Pretendard"/>
                 <a:cs typeface="Pretendard"/>
               </a:rPr>
-              <a:t>Connection refused</a:t>
+              <a:t>could not be established</a:t>
             </a:r>
           </a:p>
         </p:txBody>
@@ -11703,7 +11703,7 @@
                 <a:ea typeface="Pretendard"/>
                 <a:cs typeface="Pretendard"/>
               </a:rPr>
-              <a:t>브로커가 아직 기동 중</a:t>
+              <a:t>브로커가 아직 뜨는 중</a:t>
             </a:r>
           </a:p>
           <a:p>
@@ -11796,7 +11796,7 @@
                 <a:ea typeface="Pretendard"/>
                 <a:cs typeface="Pretendard"/>
               </a:rPr>
-              <a:t>docker logs kafka 에</a:t>
+              <a:t>뜨는 중이면 저절로 이어감 ·</a:t>
             </a:r>
           </a:p>
           <a:p>
@@ -11814,7 +11814,7 @@
                 <a:ea typeface="Pretendard"/>
                 <a:cs typeface="Pretendard"/>
               </a:rPr>
-              <a:t>Server started 까지 대기</a:t>
+              <a:t>계속되면 docker logs</a:t>
             </a:r>
           </a:p>
         </p:txBody>
@@ -12354,9 +12354,159 @@
                 <a:ea typeface="Pretendard"/>
                 <a:cs typeface="Pretendard"/>
               </a:rPr>
-              <a:t>단일 브로커에서는</a:t>
-            </a:r>
-          </a:p>
+              <a:t>단일 브로커는 1</a:t>
+            </a:r>
+          </a:p>
+        </p:txBody>
+      </p:sp>
+      <p:sp>
+        <p:nvSpPr>
+          <p:cNvPr id="38" name="Rounded Rectangle 37"/>
+          <p:cNvSpPr/>
+          <p:nvPr/>
+        </p:nvSpPr>
+        <p:spPr>
+          <a:xfrm>
+            <a:off x="1143000" y="6343650"/>
+            <a:ext cx="5082540" cy="647700"/>
+          </a:xfrm>
+          <a:prstGeom prst="roundRect">
+            <a:avLst>
+              <a:gd name="adj" fmla="val 5882"/>
+            </a:avLst>
+          </a:prstGeom>
+          <a:solidFill>
+            <a:srgbClr val="EDF3FD"/>
+          </a:solidFill>
+          <a:ln w="9525">
+            <a:solidFill>
+              <a:srgbClr val="BFD3F5"/>
+            </a:solidFill>
+          </a:ln>
+          <a:effectLst/>
+        </p:spPr>
+        <p:txBody>
+          <a:bodyPr rtlCol="0" anchor="ctr" wrap="square"/>
+          <a:lstStyle/>
+          <a:p>
+            <a:pPr algn="ctr"/>
+          </a:p>
+        </p:txBody>
+      </p:sp>
+      <p:sp>
+        <p:nvSpPr>
+          <p:cNvPr id="39" name="TextBox 38"/>
+          <p:cNvSpPr txBox="1"/>
+          <p:nvPr/>
+        </p:nvSpPr>
+        <p:spPr>
+          <a:xfrm>
+            <a:off x="1238250" y="6343650"/>
+            <a:ext cx="4892040" cy="647700"/>
+          </a:xfrm>
+          <a:prstGeom prst="rect">
+            <a:avLst/>
+          </a:prstGeom>
+          <a:noFill/>
+        </p:spPr>
+        <p:txBody>
+          <a:bodyPr wrap="square" lIns="0" rIns="0" tIns="0" bIns="0" anchor="ctr">
+            <a:spAutoFit/>
+          </a:bodyPr>
+          <a:lstStyle/>
+          <a:p>
+            <a:pPr algn="l">
+              <a:lnSpc>
+                <a:spcPct val="115000"/>
+              </a:lnSpc>
+            </a:pPr>
+            <a:r>
+              <a:rPr sz="1875" b="1">
+                <a:solidFill>
+                  <a:srgbClr val="0D2B5E"/>
+                </a:solidFill>
+                <a:latin typeface="Pretendard"/>
+                <a:ea typeface="Pretendard"/>
+                <a:cs typeface="Pretendard"/>
+              </a:rPr>
+              <a:t>No key separator found</a:t>
+            </a:r>
+          </a:p>
+          <a:p>
+            <a:pPr algn="l">
+              <a:lnSpc>
+                <a:spcPct val="115000"/>
+              </a:lnSpc>
+            </a:pPr>
+            <a:r>
+              <a:rPr sz="1875" b="1">
+                <a:solidFill>
+                  <a:srgbClr val="0D2B5E"/>
+                </a:solidFill>
+                <a:latin typeface="Pretendard"/>
+                <a:ea typeface="Pretendard"/>
+                <a:cs typeface="Pretendard"/>
+              </a:rPr>
+              <a:t>on line number 1</a:t>
+            </a:r>
+          </a:p>
+        </p:txBody>
+      </p:sp>
+      <p:sp>
+        <p:nvSpPr>
+          <p:cNvPr id="40" name="Rounded Rectangle 39"/>
+          <p:cNvSpPr/>
+          <p:nvPr/>
+        </p:nvSpPr>
+        <p:spPr>
+          <a:xfrm>
+            <a:off x="6263640" y="6343650"/>
+            <a:ext cx="5402580" cy="647700"/>
+          </a:xfrm>
+          <a:prstGeom prst="roundRect">
+            <a:avLst>
+              <a:gd name="adj" fmla="val 5882"/>
+            </a:avLst>
+          </a:prstGeom>
+          <a:solidFill>
+            <a:srgbClr val="FAFBFD"/>
+          </a:solidFill>
+          <a:ln w="9525">
+            <a:solidFill>
+              <a:srgbClr val="DCE1E8"/>
+            </a:solidFill>
+          </a:ln>
+          <a:effectLst/>
+        </p:spPr>
+        <p:txBody>
+          <a:bodyPr rtlCol="0" anchor="ctr" wrap="square"/>
+          <a:lstStyle/>
+          <a:p>
+            <a:pPr algn="ctr"/>
+          </a:p>
+        </p:txBody>
+      </p:sp>
+      <p:sp>
+        <p:nvSpPr>
+          <p:cNvPr id="41" name="TextBox 40"/>
+          <p:cNvSpPr txBox="1"/>
+          <p:nvPr/>
+        </p:nvSpPr>
+        <p:spPr>
+          <a:xfrm>
+            <a:off x="6358890" y="6343650"/>
+            <a:ext cx="5212080" cy="647700"/>
+          </a:xfrm>
+          <a:prstGeom prst="rect">
+            <a:avLst/>
+          </a:prstGeom>
+          <a:noFill/>
+        </p:spPr>
+        <p:txBody>
+          <a:bodyPr wrap="square" lIns="0" rIns="0" tIns="0" bIns="0" anchor="ctr">
+            <a:spAutoFit/>
+          </a:bodyPr>
+          <a:lstStyle/>
           <a:p>
             <a:pPr algn="ctr">
               <a:lnSpc>
@@ -12372,14 +12522,125 @@
                 <a:ea typeface="Pretendard"/>
                 <a:cs typeface="Pretendard"/>
               </a:rPr>
-              <a:t>1 로</a:t>
-            </a:r>
-          </a:p>
-        </p:txBody>
-      </p:sp>
-      <p:sp>
-        <p:nvSpPr>
-          <p:cNvPr id="38" name="TextBox 37"/>
+              <a:t>parse.key 인데</a:t>
+            </a:r>
+          </a:p>
+          <a:p>
+            <a:pPr algn="ctr">
+              <a:lnSpc>
+                <a:spcPct val="115000"/>
+              </a:lnSpc>
+            </a:pPr>
+            <a:r>
+              <a:rPr sz="1875" b="0">
+                <a:solidFill>
+                  <a:srgbClr val="3D3D3D"/>
+                </a:solidFill>
+                <a:latin typeface="Pretendard"/>
+                <a:ea typeface="Pretendard"/>
+                <a:cs typeface="Pretendard"/>
+              </a:rPr>
+              <a:t>콜론 없는 줄</a:t>
+            </a:r>
+          </a:p>
+        </p:txBody>
+      </p:sp>
+      <p:sp>
+        <p:nvSpPr>
+          <p:cNvPr id="42" name="Rounded Rectangle 41"/>
+          <p:cNvSpPr/>
+          <p:nvPr/>
+        </p:nvSpPr>
+        <p:spPr>
+          <a:xfrm>
+            <a:off x="11704320" y="6343650"/>
+            <a:ext cx="5440680" cy="647700"/>
+          </a:xfrm>
+          <a:prstGeom prst="roundRect">
+            <a:avLst>
+              <a:gd name="adj" fmla="val 5882"/>
+            </a:avLst>
+          </a:prstGeom>
+          <a:solidFill>
+            <a:srgbClr val="FAFBFD"/>
+          </a:solidFill>
+          <a:ln w="9525">
+            <a:solidFill>
+              <a:srgbClr val="DCE1E8"/>
+            </a:solidFill>
+          </a:ln>
+          <a:effectLst/>
+        </p:spPr>
+        <p:txBody>
+          <a:bodyPr rtlCol="0" anchor="ctr" wrap="square"/>
+          <a:lstStyle/>
+          <a:p>
+            <a:pPr algn="ctr"/>
+          </a:p>
+        </p:txBody>
+      </p:sp>
+      <p:sp>
+        <p:nvSpPr>
+          <p:cNvPr id="43" name="TextBox 42"/>
+          <p:cNvSpPr txBox="1"/>
+          <p:nvPr/>
+        </p:nvSpPr>
+        <p:spPr>
+          <a:xfrm>
+            <a:off x="11799570" y="6343650"/>
+            <a:ext cx="5250180" cy="647700"/>
+          </a:xfrm>
+          <a:prstGeom prst="rect">
+            <a:avLst/>
+          </a:prstGeom>
+          <a:noFill/>
+        </p:spPr>
+        <p:txBody>
+          <a:bodyPr wrap="square" lIns="0" rIns="0" tIns="0" bIns="0" anchor="ctr">
+            <a:spAutoFit/>
+          </a:bodyPr>
+          <a:lstStyle/>
+          <a:p>
+            <a:pPr algn="ctr">
+              <a:lnSpc>
+                <a:spcPct val="115000"/>
+              </a:lnSpc>
+            </a:pPr>
+            <a:r>
+              <a:rPr sz="1875" b="0">
+                <a:solidFill>
+                  <a:srgbClr val="3D3D3D"/>
+                </a:solidFill>
+                <a:latin typeface="Pretendard"/>
+                <a:ea typeface="Pretendard"/>
+                <a:cs typeface="Pretendard"/>
+              </a:rPr>
+              <a:t>Producer 다시 켜고</a:t>
+            </a:r>
+          </a:p>
+          <a:p>
+            <a:pPr algn="ctr">
+              <a:lnSpc>
+                <a:spcPct val="115000"/>
+              </a:lnSpc>
+            </a:pPr>
+            <a:r>
+              <a:rPr sz="1875" b="0">
+                <a:solidFill>
+                  <a:srgbClr val="3D3D3D"/>
+                </a:solidFill>
+                <a:latin typeface="Pretendard"/>
+                <a:ea typeface="Pretendard"/>
+                <a:cs typeface="Pretendard"/>
+              </a:rPr>
+              <a:t>키:값 으로</a:t>
+            </a:r>
+          </a:p>
+        </p:txBody>
+      </p:sp>
+      <p:sp>
+        <p:nvSpPr>
+          <p:cNvPr id="44" name="TextBox 43"/>
           <p:cNvSpPr txBox="1"/>
           <p:nvPr/>
         </p:nvSpPr>
@@ -12420,7 +12681,7 @@
       </p:sp>
       <p:sp>
         <p:nvSpPr>
-          <p:cNvPr id="39" name="Rectangle 38"/>
+          <p:cNvPr id="45" name="Rectangle 44"/>
           <p:cNvSpPr/>
           <p:nvPr/>
         </p:nvSpPr>
@@ -12450,7 +12711,7 @@
       </p:sp>
       <p:sp>
         <p:nvSpPr>
-          <p:cNvPr id="40" name="TextBox 39"/>
+          <p:cNvPr id="46" name="TextBox 45"/>
           <p:cNvSpPr txBox="1"/>
           <p:nvPr/>
         </p:nvSpPr>
@@ -12491,7 +12752,7 @@
       </p:sp>
       <p:sp>
         <p:nvSpPr>
-          <p:cNvPr id="41" name="TextBox 40"/>
+          <p:cNvPr id="47" name="TextBox 46"/>
           <p:cNvSpPr txBox="1"/>
           <p:nvPr/>
         </p:nvSpPr>
@@ -14011,7 +14272,7 @@
                 <a:ea typeface="Pretendard"/>
                 <a:cs typeface="Pretendard"/>
               </a:rPr>
-              <a:t>docker rm -f kafka</a:t>
+              <a:t>docker rm -fv kafka</a:t>
             </a:r>
           </a:p>
         </p:txBody>
@@ -14052,7 +14313,7 @@
                 <a:ea typeface="Pretendard"/>
                 <a:cs typeface="Pretendard"/>
               </a:rPr>
-              <a:t>6-2 에서 compose 로 다시 만든다 — 지워도 된다(9092 포트 충돌 방지)</a:t>
+              <a:t>6-2 에서 compose 로 다시 만든다 — -v 가 이름 없는 볼륨 3개까지 지운다</a:t>
             </a:r>
           </a:p>
         </p:txBody>
@@ -14239,7 +14500,7 @@
                 <a:ea typeface="Pretendard"/>
                 <a:cs typeface="Pretendard"/>
               </a:rPr>
-              <a:t>apache/kafka:3.7.0 이미지는 남겨 둔다</a:t>
+              <a:t>apache/kafka:3.7.0 이미지는 남겨 둔다(612MB)</a:t>
             </a:r>
           </a:p>
         </p:txBody>
@@ -14426,7 +14687,7 @@
                 <a:ea typeface="Pretendard"/>
                 <a:cs typeface="Pretendard"/>
               </a:rPr>
-              <a:t>8GB 이상 — 6-2 에서는 컨테이너가 늘어난다</a:t>
+              <a:t>7.7GiB 안팎 이상(설정 8GB, 실측 7.749GiB) — 6-2 부터 컨테이너가 늘어난다</a:t>
             </a:r>
           </a:p>
         </p:txBody>
@@ -15518,7 +15779,7 @@
                 <a:ea typeface="Pretendard"/>
                 <a:cs typeface="Pretendard"/>
               </a:rPr>
-              <a:t>준비: docker rm -f kafka 로 9092 비우기 · 작업 폴더 week6/ · 이번 주 내내 쓸 docker-compose.yml 하나로 관리</a:t>
+              <a:t>준비: docker rm -fv kafka 로 9092 비우기 · 작업 폴더 week6/ · 이번 주 내내 쓸 docker-compose.yml 하나로 관리</a:t>
             </a:r>
           </a:p>
         </p:txBody>
